--- a/Resources/Week 9 Video/Week 9 Video Presentation.pptx
+++ b/Resources/Week 9 Video/Week 9 Video Presentation.pptx
@@ -6,12 +6,16 @@
   </p:sldMasterIdLst>
   <p:sldIdLst>
     <p:sldId id="256" r:id="rId2"/>
-    <p:sldId id="257" r:id="rId3"/>
-    <p:sldId id="261" r:id="rId4"/>
+    <p:sldId id="263" r:id="rId3"/>
+    <p:sldId id="257" r:id="rId4"/>
     <p:sldId id="262" r:id="rId5"/>
     <p:sldId id="258" r:id="rId6"/>
     <p:sldId id="259" r:id="rId7"/>
     <p:sldId id="260" r:id="rId8"/>
+    <p:sldId id="264" r:id="rId9"/>
+    <p:sldId id="266" r:id="rId10"/>
+    <p:sldId id="265" r:id="rId11"/>
+    <p:sldId id="267" r:id="rId12"/>
   </p:sldIdLst>
   <p:sldSz cx="12192000" cy="6858000"/>
   <p:notesSz cx="6858000" cy="9144000"/>
@@ -110,7 +114,247 @@
       </a:defRPr>
     </a:lvl9pPr>
   </p:defaultTextStyle>
+  <p:extLst>
+    <p:ext uri="{EFAFB233-063F-42B5-8137-9DF3F51BA10A}">
+      <p15:sldGuideLst xmlns:p15="http://schemas.microsoft.com/office/powerpoint/2012/main"/>
+    </p:ext>
+  </p:extLst>
 </p:presentation>
+</file>
+
+<file path=ppt/changesInfos/changesInfo1.xml><?xml version="1.0" encoding="utf-8"?>
+<pc:chgInfo xmlns:a="http://schemas.openxmlformats.org/drawingml/2006/main" xmlns:r="http://schemas.openxmlformats.org/officeDocument/2006/relationships" xmlns:ac="http://schemas.microsoft.com/office/drawing/2013/main/command" xmlns:pc="http://schemas.microsoft.com/office/powerpoint/2013/main/command">
+  <pc:docChgLst>
+    <pc:chgData name="Kasper Hendriks" userId="87ed363209cb0fb2" providerId="LiveId" clId="{8DFFDB7F-9F00-4526-B830-325026E5AD88}"/>
+    <pc:docChg chg="undo custSel addSld delSld modSld sldOrd">
+      <pc:chgData name="Kasper Hendriks" userId="87ed363209cb0fb2" providerId="LiveId" clId="{8DFFDB7F-9F00-4526-B830-325026E5AD88}" dt="2026-05-01T03:54:49.868" v="577"/>
+      <pc:docMkLst>
+        <pc:docMk/>
+      </pc:docMkLst>
+      <pc:sldChg chg="modSp mod">
+        <pc:chgData name="Kasper Hendriks" userId="87ed363209cb0fb2" providerId="LiveId" clId="{8DFFDB7F-9F00-4526-B830-325026E5AD88}" dt="2026-05-01T03:45:38.461" v="332" actId="20577"/>
+        <pc:sldMkLst>
+          <pc:docMk/>
+          <pc:sldMk cId="2645488123" sldId="257"/>
+        </pc:sldMkLst>
+        <pc:spChg chg="mod">
+          <ac:chgData name="Kasper Hendriks" userId="87ed363209cb0fb2" providerId="LiveId" clId="{8DFFDB7F-9F00-4526-B830-325026E5AD88}" dt="2026-05-01T03:35:39.735" v="127" actId="20577"/>
+          <ac:spMkLst>
+            <pc:docMk/>
+            <pc:sldMk cId="2645488123" sldId="257"/>
+            <ac:spMk id="2" creationId="{3501D4EB-3CAD-208B-782C-2B303B057A72}"/>
+          </ac:spMkLst>
+        </pc:spChg>
+        <pc:spChg chg="mod">
+          <ac:chgData name="Kasper Hendriks" userId="87ed363209cb0fb2" providerId="LiveId" clId="{8DFFDB7F-9F00-4526-B830-325026E5AD88}" dt="2026-05-01T03:45:38.461" v="332" actId="20577"/>
+          <ac:spMkLst>
+            <pc:docMk/>
+            <pc:sldMk cId="2645488123" sldId="257"/>
+            <ac:spMk id="3" creationId="{DFF78B68-C046-0FCF-BA3A-3C52F9DB026E}"/>
+          </ac:spMkLst>
+        </pc:spChg>
+      </pc:sldChg>
+      <pc:sldChg chg="modSp mod">
+        <pc:chgData name="Kasper Hendriks" userId="87ed363209cb0fb2" providerId="LiveId" clId="{8DFFDB7F-9F00-4526-B830-325026E5AD88}" dt="2026-05-01T03:36:59.676" v="180" actId="20577"/>
+        <pc:sldMkLst>
+          <pc:docMk/>
+          <pc:sldMk cId="2294650106" sldId="258"/>
+        </pc:sldMkLst>
+        <pc:spChg chg="mod">
+          <ac:chgData name="Kasper Hendriks" userId="87ed363209cb0fb2" providerId="LiveId" clId="{8DFFDB7F-9F00-4526-B830-325026E5AD88}" dt="2026-05-01T03:36:59.676" v="180" actId="20577"/>
+          <ac:spMkLst>
+            <pc:docMk/>
+            <pc:sldMk cId="2294650106" sldId="258"/>
+            <ac:spMk id="2" creationId="{A5FBD3CD-B9E2-9BCC-DDDA-E163303E4FC0}"/>
+          </ac:spMkLst>
+        </pc:spChg>
+      </pc:sldChg>
+      <pc:sldChg chg="modSp mod">
+        <pc:chgData name="Kasper Hendriks" userId="87ed363209cb0fb2" providerId="LiveId" clId="{8DFFDB7F-9F00-4526-B830-325026E5AD88}" dt="2026-05-01T03:39:06.839" v="323" actId="20577"/>
+        <pc:sldMkLst>
+          <pc:docMk/>
+          <pc:sldMk cId="3533252748" sldId="259"/>
+        </pc:sldMkLst>
+        <pc:spChg chg="mod">
+          <ac:chgData name="Kasper Hendriks" userId="87ed363209cb0fb2" providerId="LiveId" clId="{8DFFDB7F-9F00-4526-B830-325026E5AD88}" dt="2026-05-01T03:37:07.073" v="192" actId="20577"/>
+          <ac:spMkLst>
+            <pc:docMk/>
+            <pc:sldMk cId="3533252748" sldId="259"/>
+            <ac:spMk id="2" creationId="{00D31335-53DF-A145-2AA8-BD53B8706365}"/>
+          </ac:spMkLst>
+        </pc:spChg>
+        <pc:spChg chg="mod">
+          <ac:chgData name="Kasper Hendriks" userId="87ed363209cb0fb2" providerId="LiveId" clId="{8DFFDB7F-9F00-4526-B830-325026E5AD88}" dt="2026-05-01T03:39:06.839" v="323" actId="20577"/>
+          <ac:spMkLst>
+            <pc:docMk/>
+            <pc:sldMk cId="3533252748" sldId="259"/>
+            <ac:spMk id="3" creationId="{AFF3E35C-CB06-23C9-01FD-F715C6AE8A2C}"/>
+          </ac:spMkLst>
+        </pc:spChg>
+      </pc:sldChg>
+      <pc:sldChg chg="modSp mod">
+        <pc:chgData name="Kasper Hendriks" userId="87ed363209cb0fb2" providerId="LiveId" clId="{8DFFDB7F-9F00-4526-B830-325026E5AD88}" dt="2026-05-01T03:48:20.051" v="412" actId="20577"/>
+        <pc:sldMkLst>
+          <pc:docMk/>
+          <pc:sldMk cId="4006166357" sldId="260"/>
+        </pc:sldMkLst>
+        <pc:spChg chg="mod">
+          <ac:chgData name="Kasper Hendriks" userId="87ed363209cb0fb2" providerId="LiveId" clId="{8DFFDB7F-9F00-4526-B830-325026E5AD88}" dt="2026-05-01T03:48:11.955" v="360" actId="20577"/>
+          <ac:spMkLst>
+            <pc:docMk/>
+            <pc:sldMk cId="4006166357" sldId="260"/>
+            <ac:spMk id="2" creationId="{472ABF5B-D885-4CCF-406C-05A069120570}"/>
+          </ac:spMkLst>
+        </pc:spChg>
+        <pc:spChg chg="mod">
+          <ac:chgData name="Kasper Hendriks" userId="87ed363209cb0fb2" providerId="LiveId" clId="{8DFFDB7F-9F00-4526-B830-325026E5AD88}" dt="2026-05-01T03:48:20.051" v="412" actId="20577"/>
+          <ac:spMkLst>
+            <pc:docMk/>
+            <pc:sldMk cId="4006166357" sldId="260"/>
+            <ac:spMk id="3" creationId="{231285A8-6403-D04A-8E78-FD7A6E91A580}"/>
+          </ac:spMkLst>
+        </pc:spChg>
+      </pc:sldChg>
+      <pc:sldChg chg="del">
+        <pc:chgData name="Kasper Hendriks" userId="87ed363209cb0fb2" providerId="LiveId" clId="{8DFFDB7F-9F00-4526-B830-325026E5AD88}" dt="2026-05-01T03:35:36.302" v="126" actId="47"/>
+        <pc:sldMkLst>
+          <pc:docMk/>
+          <pc:sldMk cId="1290089518" sldId="261"/>
+        </pc:sldMkLst>
+      </pc:sldChg>
+      <pc:sldChg chg="modSp mod">
+        <pc:chgData name="Kasper Hendriks" userId="87ed363209cb0fb2" providerId="LiveId" clId="{8DFFDB7F-9F00-4526-B830-325026E5AD88}" dt="2026-05-01T03:49:46.870" v="448" actId="20577"/>
+        <pc:sldMkLst>
+          <pc:docMk/>
+          <pc:sldMk cId="2978164609" sldId="262"/>
+        </pc:sldMkLst>
+        <pc:spChg chg="mod">
+          <ac:chgData name="Kasper Hendriks" userId="87ed363209cb0fb2" providerId="LiveId" clId="{8DFFDB7F-9F00-4526-B830-325026E5AD88}" dt="2026-05-01T03:36:45.504" v="148" actId="20577"/>
+          <ac:spMkLst>
+            <pc:docMk/>
+            <pc:sldMk cId="2978164609" sldId="262"/>
+            <ac:spMk id="2" creationId="{D51D0F33-75EB-F80D-3A52-96FB7ECF97C4}"/>
+          </ac:spMkLst>
+        </pc:spChg>
+        <pc:spChg chg="mod">
+          <ac:chgData name="Kasper Hendriks" userId="87ed363209cb0fb2" providerId="LiveId" clId="{8DFFDB7F-9F00-4526-B830-325026E5AD88}" dt="2026-05-01T03:49:46.870" v="448" actId="20577"/>
+          <ac:spMkLst>
+            <pc:docMk/>
+            <pc:sldMk cId="2978164609" sldId="262"/>
+            <ac:spMk id="3" creationId="{78955F29-B0BB-2D39-D32B-984E47D21025}"/>
+          </ac:spMkLst>
+        </pc:spChg>
+      </pc:sldChg>
+      <pc:sldChg chg="modSp new mod">
+        <pc:chgData name="Kasper Hendriks" userId="87ed363209cb0fb2" providerId="LiveId" clId="{8DFFDB7F-9F00-4526-B830-325026E5AD88}" dt="2026-05-01T03:35:28.956" v="125" actId="20577"/>
+        <pc:sldMkLst>
+          <pc:docMk/>
+          <pc:sldMk cId="445307200" sldId="263"/>
+        </pc:sldMkLst>
+        <pc:spChg chg="mod">
+          <ac:chgData name="Kasper Hendriks" userId="87ed363209cb0fb2" providerId="LiveId" clId="{8DFFDB7F-9F00-4526-B830-325026E5AD88}" dt="2026-05-01T03:14:15.703" v="20" actId="20577"/>
+          <ac:spMkLst>
+            <pc:docMk/>
+            <pc:sldMk cId="445307200" sldId="263"/>
+            <ac:spMk id="2" creationId="{B0D63501-6445-410D-3FB0-AA470B8D2244}"/>
+          </ac:spMkLst>
+        </pc:spChg>
+        <pc:spChg chg="mod">
+          <ac:chgData name="Kasper Hendriks" userId="87ed363209cb0fb2" providerId="LiveId" clId="{8DFFDB7F-9F00-4526-B830-325026E5AD88}" dt="2026-05-01T03:35:28.956" v="125" actId="20577"/>
+          <ac:spMkLst>
+            <pc:docMk/>
+            <pc:sldMk cId="445307200" sldId="263"/>
+            <ac:spMk id="3" creationId="{99FF19A5-7E34-F76E-0A69-F054720105A4}"/>
+          </ac:spMkLst>
+        </pc:spChg>
+      </pc:sldChg>
+      <pc:sldChg chg="modSp new mod">
+        <pc:chgData name="Kasper Hendriks" userId="87ed363209cb0fb2" providerId="LiveId" clId="{8DFFDB7F-9F00-4526-B830-325026E5AD88}" dt="2026-05-01T03:50:35" v="468" actId="20577"/>
+        <pc:sldMkLst>
+          <pc:docMk/>
+          <pc:sldMk cId="3731580114" sldId="264"/>
+        </pc:sldMkLst>
+        <pc:spChg chg="mod">
+          <ac:chgData name="Kasper Hendriks" userId="87ed363209cb0fb2" providerId="LiveId" clId="{8DFFDB7F-9F00-4526-B830-325026E5AD88}" dt="2026-05-01T03:50:26.370" v="464" actId="20577"/>
+          <ac:spMkLst>
+            <pc:docMk/>
+            <pc:sldMk cId="3731580114" sldId="264"/>
+            <ac:spMk id="2" creationId="{A4AE0A10-B3AE-552F-8344-5C59660A74E2}"/>
+          </ac:spMkLst>
+        </pc:spChg>
+        <pc:spChg chg="mod">
+          <ac:chgData name="Kasper Hendriks" userId="87ed363209cb0fb2" providerId="LiveId" clId="{8DFFDB7F-9F00-4526-B830-325026E5AD88}" dt="2026-05-01T03:50:35" v="468" actId="20577"/>
+          <ac:spMkLst>
+            <pc:docMk/>
+            <pc:sldMk cId="3731580114" sldId="264"/>
+            <ac:spMk id="3" creationId="{CDD87CCE-CE9F-E7AB-74C1-FE46ACF9B231}"/>
+          </ac:spMkLst>
+        </pc:spChg>
+      </pc:sldChg>
+      <pc:sldChg chg="modSp new mod">
+        <pc:chgData name="Kasper Hendriks" userId="87ed363209cb0fb2" providerId="LiveId" clId="{8DFFDB7F-9F00-4526-B830-325026E5AD88}" dt="2026-05-01T03:53:04.176" v="558" actId="20577"/>
+        <pc:sldMkLst>
+          <pc:docMk/>
+          <pc:sldMk cId="919223682" sldId="265"/>
+        </pc:sldMkLst>
+        <pc:spChg chg="mod">
+          <ac:chgData name="Kasper Hendriks" userId="87ed363209cb0fb2" providerId="LiveId" clId="{8DFFDB7F-9F00-4526-B830-325026E5AD88}" dt="2026-05-01T03:53:04.176" v="558" actId="20577"/>
+          <ac:spMkLst>
+            <pc:docMk/>
+            <pc:sldMk cId="919223682" sldId="265"/>
+            <ac:spMk id="2" creationId="{1C107ECD-831C-8D74-417A-556FA700DFB2}"/>
+          </ac:spMkLst>
+        </pc:spChg>
+      </pc:sldChg>
+      <pc:sldChg chg="modSp new mod ord">
+        <pc:chgData name="Kasper Hendriks" userId="87ed363209cb0fb2" providerId="LiveId" clId="{8DFFDB7F-9F00-4526-B830-325026E5AD88}" dt="2026-05-01T03:52:45.221" v="553" actId="20577"/>
+        <pc:sldMkLst>
+          <pc:docMk/>
+          <pc:sldMk cId="1441937421" sldId="266"/>
+        </pc:sldMkLst>
+        <pc:spChg chg="mod">
+          <ac:chgData name="Kasper Hendriks" userId="87ed363209cb0fb2" providerId="LiveId" clId="{8DFFDB7F-9F00-4526-B830-325026E5AD88}" dt="2026-05-01T03:52:45.221" v="553" actId="20577"/>
+          <ac:spMkLst>
+            <pc:docMk/>
+            <pc:sldMk cId="1441937421" sldId="266"/>
+            <ac:spMk id="2" creationId="{083CEA2D-89BB-E877-DD77-D6078BCCC4F4}"/>
+          </ac:spMkLst>
+        </pc:spChg>
+      </pc:sldChg>
+      <pc:sldChg chg="addSp delSp modSp new mod">
+        <pc:chgData name="Kasper Hendriks" userId="87ed363209cb0fb2" providerId="LiveId" clId="{8DFFDB7F-9F00-4526-B830-325026E5AD88}" dt="2026-05-01T03:54:49.868" v="577"/>
+        <pc:sldMkLst>
+          <pc:docMk/>
+          <pc:sldMk cId="1062972772" sldId="267"/>
+        </pc:sldMkLst>
+        <pc:spChg chg="mod">
+          <ac:chgData name="Kasper Hendriks" userId="87ed363209cb0fb2" providerId="LiveId" clId="{8DFFDB7F-9F00-4526-B830-325026E5AD88}" dt="2026-05-01T03:53:12.998" v="569" actId="20577"/>
+          <ac:spMkLst>
+            <pc:docMk/>
+            <pc:sldMk cId="1062972772" sldId="267"/>
+            <ac:spMk id="2" creationId="{1ACBFDC0-BCF9-F8D6-80D5-DF6D26CC3E26}"/>
+          </ac:spMkLst>
+        </pc:spChg>
+        <pc:spChg chg="add del mod">
+          <ac:chgData name="Kasper Hendriks" userId="87ed363209cb0fb2" providerId="LiveId" clId="{8DFFDB7F-9F00-4526-B830-325026E5AD88}" dt="2026-05-01T03:54:49.868" v="577"/>
+          <ac:spMkLst>
+            <pc:docMk/>
+            <pc:sldMk cId="1062972772" sldId="267"/>
+            <ac:spMk id="3" creationId="{B31B569C-270D-BE3C-6E68-AC692A28F1DE}"/>
+          </ac:spMkLst>
+        </pc:spChg>
+        <pc:spChg chg="add mod">
+          <ac:chgData name="Kasper Hendriks" userId="87ed363209cb0fb2" providerId="LiveId" clId="{8DFFDB7F-9F00-4526-B830-325026E5AD88}" dt="2026-05-01T03:54:47.769" v="575"/>
+          <ac:spMkLst>
+            <pc:docMk/>
+            <pc:sldMk cId="1062972772" sldId="267"/>
+            <ac:spMk id="4" creationId="{CA3ADCC5-FA09-6D03-CA99-4B8FAB3206B2}"/>
+          </ac:spMkLst>
+        </pc:spChg>
+      </pc:sldChg>
+    </pc:docChg>
+  </pc:docChgLst>
+</pc:chgInfo>
 </file>
 
 <file path=ppt/slideLayouts/slideLayout1.xml><?xml version="1.0" encoding="utf-8"?>
@@ -3889,6 +4133,188 @@
 </p:sld>
 </file>
 
+<file path=ppt/slides/slide10.xml><?xml version="1.0" encoding="utf-8"?>
+<p:sld xmlns:a="http://schemas.openxmlformats.org/drawingml/2006/main" xmlns:r="http://schemas.openxmlformats.org/officeDocument/2006/relationships" xmlns:p="http://schemas.openxmlformats.org/presentationml/2006/main">
+  <p:cSld>
+    <p:spTree>
+      <p:nvGrpSpPr>
+        <p:cNvPr id="1" name=""/>
+        <p:cNvGrpSpPr/>
+        <p:nvPr/>
+      </p:nvGrpSpPr>
+      <p:grpSpPr>
+        <a:xfrm>
+          <a:off x="0" y="0"/>
+          <a:ext cx="0" cy="0"/>
+          <a:chOff x="0" y="0"/>
+          <a:chExt cx="0" cy="0"/>
+        </a:xfrm>
+      </p:grpSpPr>
+      <p:sp>
+        <p:nvSpPr>
+          <p:cNvPr id="2" name="Title 1">
+            <a:extLst>
+              <a:ext uri="{FF2B5EF4-FFF2-40B4-BE49-F238E27FC236}">
+                <a16:creationId xmlns:a16="http://schemas.microsoft.com/office/drawing/2014/main" id="{1C107ECD-831C-8D74-417A-556FA700DFB2}"/>
+              </a:ext>
+            </a:extLst>
+          </p:cNvPr>
+          <p:cNvSpPr>
+            <a:spLocks noGrp="1"/>
+          </p:cNvSpPr>
+          <p:nvPr>
+            <p:ph type="title"/>
+          </p:nvPr>
+        </p:nvSpPr>
+        <p:spPr/>
+        <p:txBody>
+          <a:bodyPr/>
+          <a:lstStyle/>
+          <a:p>
+            <a:r>
+              <a:rPr lang="en-AU" dirty="0"/>
+              <a:t>Java Walkthrough – Pt 2</a:t>
+            </a:r>
+          </a:p>
+        </p:txBody>
+      </p:sp>
+      <p:sp>
+        <p:nvSpPr>
+          <p:cNvPr id="3" name="Content Placeholder 2">
+            <a:extLst>
+              <a:ext uri="{FF2B5EF4-FFF2-40B4-BE49-F238E27FC236}">
+                <a16:creationId xmlns:a16="http://schemas.microsoft.com/office/drawing/2014/main" id="{5C061615-93D5-2417-A0B5-803151B47BDD}"/>
+              </a:ext>
+            </a:extLst>
+          </p:cNvPr>
+          <p:cNvSpPr>
+            <a:spLocks noGrp="1"/>
+          </p:cNvSpPr>
+          <p:nvPr>
+            <p:ph idx="1"/>
+          </p:nvPr>
+        </p:nvSpPr>
+        <p:spPr/>
+        <p:txBody>
+          <a:bodyPr/>
+          <a:lstStyle/>
+          <a:p>
+            <a:endParaRPr lang="en-AU"/>
+          </a:p>
+        </p:txBody>
+      </p:sp>
+    </p:spTree>
+    <p:extLst>
+      <p:ext uri="{BB962C8B-B14F-4D97-AF65-F5344CB8AC3E}">
+        <p14:creationId xmlns:p14="http://schemas.microsoft.com/office/powerpoint/2010/main" val="919223682"/>
+      </p:ext>
+    </p:extLst>
+  </p:cSld>
+  <p:clrMapOvr>
+    <a:masterClrMapping/>
+  </p:clrMapOvr>
+</p:sld>
+</file>
+
+<file path=ppt/slides/slide11.xml><?xml version="1.0" encoding="utf-8"?>
+<p:sld xmlns:a="http://schemas.openxmlformats.org/drawingml/2006/main" xmlns:r="http://schemas.openxmlformats.org/officeDocument/2006/relationships" xmlns:p="http://schemas.openxmlformats.org/presentationml/2006/main">
+  <p:cSld>
+    <p:spTree>
+      <p:nvGrpSpPr>
+        <p:cNvPr id="1" name=""/>
+        <p:cNvGrpSpPr/>
+        <p:nvPr/>
+      </p:nvGrpSpPr>
+      <p:grpSpPr>
+        <a:xfrm>
+          <a:off x="0" y="0"/>
+          <a:ext cx="0" cy="0"/>
+          <a:chOff x="0" y="0"/>
+          <a:chExt cx="0" cy="0"/>
+        </a:xfrm>
+      </p:grpSpPr>
+      <p:sp>
+        <p:nvSpPr>
+          <p:cNvPr id="2" name="Title 1">
+            <a:extLst>
+              <a:ext uri="{FF2B5EF4-FFF2-40B4-BE49-F238E27FC236}">
+                <a16:creationId xmlns:a16="http://schemas.microsoft.com/office/drawing/2014/main" id="{1ACBFDC0-BCF9-F8D6-80D5-DF6D26CC3E26}"/>
+              </a:ext>
+            </a:extLst>
+          </p:cNvPr>
+          <p:cNvSpPr>
+            <a:spLocks noGrp="1"/>
+          </p:cNvSpPr>
+          <p:nvPr>
+            <p:ph type="title"/>
+          </p:nvPr>
+        </p:nvSpPr>
+        <p:spPr/>
+        <p:txBody>
+          <a:bodyPr/>
+          <a:lstStyle/>
+          <a:p>
+            <a:r>
+              <a:rPr lang="en-AU" dirty="0"/>
+              <a:t>Test Suite</a:t>
+            </a:r>
+          </a:p>
+        </p:txBody>
+      </p:sp>
+      <p:sp>
+        <p:nvSpPr>
+          <p:cNvPr id="3" name="Content Placeholder 2">
+            <a:extLst>
+              <a:ext uri="{FF2B5EF4-FFF2-40B4-BE49-F238E27FC236}">
+                <a16:creationId xmlns:a16="http://schemas.microsoft.com/office/drawing/2014/main" id="{B31B569C-270D-BE3C-6E68-AC692A28F1DE}"/>
+              </a:ext>
+            </a:extLst>
+          </p:cNvPr>
+          <p:cNvSpPr>
+            <a:spLocks noGrp="1"/>
+          </p:cNvSpPr>
+          <p:nvPr>
+            <p:ph idx="1"/>
+          </p:nvPr>
+        </p:nvSpPr>
+        <p:spPr/>
+        <p:txBody>
+          <a:bodyPr/>
+          <a:lstStyle/>
+          <a:p>
+            <a:r>
+              <a:rPr lang="en-GB" dirty="0"/>
+              <a:t>Explain test purpose</a:t>
+            </a:r>
+          </a:p>
+          <a:p>
+            <a:r>
+              <a:rPr lang="en-GB" dirty="0"/>
+              <a:t>Show Red-Green-Refactor evidence</a:t>
+            </a:r>
+          </a:p>
+          <a:p>
+            <a:r>
+              <a:rPr lang="en-GB" dirty="0"/>
+              <a:t>Run tests</a:t>
+            </a:r>
+            <a:endParaRPr lang="en-AU" dirty="0"/>
+          </a:p>
+        </p:txBody>
+      </p:sp>
+    </p:spTree>
+    <p:extLst>
+      <p:ext uri="{BB962C8B-B14F-4D97-AF65-F5344CB8AC3E}">
+        <p14:creationId xmlns:p14="http://schemas.microsoft.com/office/powerpoint/2010/main" val="1062972772"/>
+      </p:ext>
+    </p:extLst>
+  </p:cSld>
+  <p:clrMapOvr>
+    <a:masterClrMapping/>
+  </p:clrMapOvr>
+</p:sld>
+</file>
+
 <file path=ppt/slides/slide2.xml><?xml version="1.0" encoding="utf-8"?>
 <p:sld xmlns:a="http://schemas.openxmlformats.org/drawingml/2006/main" xmlns:r="http://schemas.openxmlformats.org/officeDocument/2006/relationships" xmlns:p="http://schemas.openxmlformats.org/presentationml/2006/main">
   <p:cSld>
@@ -3911,7 +4337,7 @@
           <p:cNvPr id="2" name="Title 1">
             <a:extLst>
               <a:ext uri="{FF2B5EF4-FFF2-40B4-BE49-F238E27FC236}">
-                <a16:creationId xmlns:a16="http://schemas.microsoft.com/office/drawing/2014/main" id="{3501D4EB-3CAD-208B-782C-2B303B057A72}"/>
+                <a16:creationId xmlns:a16="http://schemas.microsoft.com/office/drawing/2014/main" id="{B0D63501-6445-410D-3FB0-AA470B8D2244}"/>
               </a:ext>
             </a:extLst>
           </p:cNvPr>
@@ -3929,7 +4355,7 @@
           <a:p>
             <a:r>
               <a:rPr lang="en-AU" dirty="0"/>
-              <a:t>Agile Planning - User Stories</a:t>
+              <a:t>Project Introduction</a:t>
             </a:r>
           </a:p>
         </p:txBody>
@@ -3939,7 +4365,7 @@
           <p:cNvPr id="3" name="Content Placeholder 2">
             <a:extLst>
               <a:ext uri="{FF2B5EF4-FFF2-40B4-BE49-F238E27FC236}">
-                <a16:creationId xmlns:a16="http://schemas.microsoft.com/office/drawing/2014/main" id="{DFF78B68-C046-0FCF-BA3A-3C52F9DB026E}"/>
+                <a16:creationId xmlns:a16="http://schemas.microsoft.com/office/drawing/2014/main" id="{99FF19A5-7E34-F76E-0A69-F054720105A4}"/>
               </a:ext>
             </a:extLst>
           </p:cNvPr>
@@ -3955,35 +4381,24 @@
           <a:bodyPr/>
           <a:lstStyle/>
           <a:p>
-            <a:endParaRPr lang="en-AU" b="1" u="sng" dirty="0"/>
-          </a:p>
-          <a:p>
-            <a:endParaRPr lang="en-AU" b="1" u="sng" dirty="0"/>
-          </a:p>
-          <a:p>
-            <a:endParaRPr lang="en-AU" b="1" u="sng" dirty="0"/>
-          </a:p>
-          <a:p>
-            <a:endParaRPr lang="en-AU" b="1" u="sng" dirty="0"/>
-          </a:p>
-          <a:p>
-            <a:endParaRPr lang="en-AU" b="1" u="sng" dirty="0"/>
-          </a:p>
-          <a:p>
-            <a:endParaRPr lang="en-AU" b="1" u="sng" dirty="0"/>
-          </a:p>
-          <a:p>
-            <a:endParaRPr lang="en-AU" b="1" u="sng" dirty="0"/>
-          </a:p>
-          <a:p>
-            <a:r>
-              <a:rPr lang="en-US" dirty="0" err="1"/>
-              <a:t>Github</a:t>
-            </a:r>
-            <a:r>
-              <a:rPr lang="en-US" dirty="0"/>
-              <a:t> file path: Resources/User Stories/MoSCoW_User_Stories_Full.pdf</a:t>
-            </a:r>
+            <a:r>
+              <a:rPr lang="en-AU" dirty="0"/>
+              <a:t>- similar applications</a:t>
+            </a:r>
+          </a:p>
+          <a:p>
+            <a:r>
+              <a:rPr lang="en-AU" dirty="0"/>
+              <a:t>- functionally both apps</a:t>
+            </a:r>
+          </a:p>
+          <a:p>
+            <a:r>
+              <a:rPr lang="en-AU" dirty="0"/>
+              <a:t>- ai implementation</a:t>
+            </a:r>
+          </a:p>
+          <a:p>
             <a:endParaRPr lang="en-AU" dirty="0"/>
           </a:p>
         </p:txBody>
@@ -3991,7 +4406,7 @@
     </p:spTree>
     <p:extLst>
       <p:ext uri="{BB962C8B-B14F-4D97-AF65-F5344CB8AC3E}">
-        <p14:creationId xmlns:p14="http://schemas.microsoft.com/office/powerpoint/2010/main" val="2645488123"/>
+        <p14:creationId xmlns:p14="http://schemas.microsoft.com/office/powerpoint/2010/main" val="445307200"/>
       </p:ext>
     </p:extLst>
   </p:cSld>
@@ -4023,7 +4438,7 @@
           <p:cNvPr id="2" name="Title 1">
             <a:extLst>
               <a:ext uri="{FF2B5EF4-FFF2-40B4-BE49-F238E27FC236}">
-                <a16:creationId xmlns:a16="http://schemas.microsoft.com/office/drawing/2014/main" id="{3E2B24C7-DD7E-DED3-8A6B-980857324E4A}"/>
+                <a16:creationId xmlns:a16="http://schemas.microsoft.com/office/drawing/2014/main" id="{3501D4EB-3CAD-208B-782C-2B303B057A72}"/>
               </a:ext>
             </a:extLst>
           </p:cNvPr>
@@ -4041,7 +4456,7 @@
           <a:p>
             <a:r>
               <a:rPr lang="en-AU" dirty="0"/>
-              <a:t>Agile Planning – Jira Sprints</a:t>
+              <a:t>User Stories</a:t>
             </a:r>
           </a:p>
         </p:txBody>
@@ -4051,7 +4466,7 @@
           <p:cNvPr id="3" name="Content Placeholder 2">
             <a:extLst>
               <a:ext uri="{FF2B5EF4-FFF2-40B4-BE49-F238E27FC236}">
-                <a16:creationId xmlns:a16="http://schemas.microsoft.com/office/drawing/2014/main" id="{9AB90193-A8D9-EB24-97FB-626A143DE6E5}"/>
+                <a16:creationId xmlns:a16="http://schemas.microsoft.com/office/drawing/2014/main" id="{DFF78B68-C046-0FCF-BA3A-3C52F9DB026E}"/>
               </a:ext>
             </a:extLst>
           </p:cNvPr>
@@ -4067,9 +4482,45 @@
           <a:bodyPr/>
           <a:lstStyle/>
           <a:p>
+            <a:endParaRPr lang="en-AU" b="1" u="sng" dirty="0"/>
+          </a:p>
+          <a:p>
             <a:pPr marL="0" indent="0">
               <a:buNone/>
             </a:pPr>
+            <a:r>
+              <a:rPr lang="en-AU" dirty="0"/>
+              <a:t>prioritisation, estimate, acceptance criteria</a:t>
+            </a:r>
+            <a:endParaRPr lang="en-AU" b="1" u="sng" dirty="0"/>
+          </a:p>
+          <a:p>
+            <a:endParaRPr lang="en-AU" b="1" u="sng" dirty="0"/>
+          </a:p>
+          <a:p>
+            <a:endParaRPr lang="en-AU" b="1" u="sng" dirty="0"/>
+          </a:p>
+          <a:p>
+            <a:endParaRPr lang="en-AU" b="1" u="sng" dirty="0"/>
+          </a:p>
+          <a:p>
+            <a:endParaRPr lang="en-AU" b="1" u="sng" dirty="0"/>
+          </a:p>
+          <a:p>
+            <a:endParaRPr lang="en-AU" b="1" u="sng" dirty="0"/>
+          </a:p>
+          <a:p>
+            <a:endParaRPr lang="en-US" dirty="0"/>
+          </a:p>
+          <a:p>
+            <a:r>
+              <a:rPr lang="en-US" dirty="0" err="1"/>
+              <a:t>Github</a:t>
+            </a:r>
+            <a:r>
+              <a:rPr lang="en-US" dirty="0"/>
+              <a:t> file path: Resources/User Stories/MoSCoW_User_Stories_Full.pdf</a:t>
+            </a:r>
             <a:endParaRPr lang="en-AU" dirty="0"/>
           </a:p>
         </p:txBody>
@@ -4077,7 +4528,7 @@
     </p:spTree>
     <p:extLst>
       <p:ext uri="{BB962C8B-B14F-4D97-AF65-F5344CB8AC3E}">
-        <p14:creationId xmlns:p14="http://schemas.microsoft.com/office/powerpoint/2010/main" val="1290089518"/>
+        <p14:creationId xmlns:p14="http://schemas.microsoft.com/office/powerpoint/2010/main" val="2645488123"/>
       </p:ext>
     </p:extLst>
   </p:cSld>
@@ -4127,13 +4578,8 @@
           <a:p>
             <a:r>
               <a:rPr lang="en-AU" dirty="0"/>
-              <a:t>Agile Planning - </a:t>
-            </a:r>
-            <a:r>
-              <a:rPr lang="en-AU" dirty="0" err="1"/>
-              <a:t>Github</a:t>
-            </a:r>
-            <a:endParaRPr lang="en-AU" dirty="0"/>
+              <a:t>Team Planning - Jira</a:t>
+            </a:r>
           </a:p>
         </p:txBody>
       </p:sp>
@@ -4158,7 +4604,19 @@
           <a:bodyPr/>
           <a:lstStyle/>
           <a:p>
-            <a:endParaRPr lang="en-AU"/>
+            <a:r>
+              <a:rPr lang="en-AU" dirty="0"/>
+              <a:t>Show sprints</a:t>
+            </a:r>
+          </a:p>
+          <a:p>
+            <a:r>
+              <a:rPr lang="en-AU" dirty="0"/>
+              <a:t>Show sprint completion</a:t>
+            </a:r>
+          </a:p>
+          <a:p>
+            <a:endParaRPr lang="en-AU" dirty="0"/>
           </a:p>
         </p:txBody>
       </p:sp>
@@ -4215,7 +4673,7 @@
           <a:p>
             <a:r>
               <a:rPr lang="en-AU" dirty="0"/>
-              <a:t>Object-Oriented Design</a:t>
+              <a:t>Low-Fidelity UI Prototyping</a:t>
             </a:r>
           </a:p>
         </p:txBody>
@@ -4241,7 +4699,7 @@
           <a:bodyPr/>
           <a:lstStyle/>
           <a:p>
-            <a:endParaRPr lang="en-AU"/>
+            <a:endParaRPr lang="en-AU" dirty="0"/>
           </a:p>
         </p:txBody>
       </p:sp>
@@ -4298,7 +4756,7 @@
           <a:p>
             <a:r>
               <a:rPr lang="en-AU" dirty="0"/>
-              <a:t>Version Control Workflow</a:t>
+              <a:t>Project Demo</a:t>
             </a:r>
           </a:p>
         </p:txBody>
@@ -4324,7 +4782,19 @@
           <a:bodyPr/>
           <a:lstStyle/>
           <a:p>
-            <a:endParaRPr lang="en-AU"/>
+            <a:r>
+              <a:rPr lang="en-AU" dirty="0"/>
+              <a:t>- link project demo video.</a:t>
+            </a:r>
+          </a:p>
+          <a:p>
+            <a:endParaRPr lang="en-AU" dirty="0"/>
+          </a:p>
+          <a:p>
+            <a:r>
+              <a:rPr lang="en-AU" dirty="0"/>
+              <a:t>Demonstrate persistent databases, create account error handling, </a:t>
+            </a:r>
           </a:p>
         </p:txBody>
       </p:sp>
@@ -4381,7 +4851,7 @@
           <a:p>
             <a:r>
               <a:rPr lang="en-AU" dirty="0"/>
-              <a:t>Test-Driven Development</a:t>
+              <a:t>PM Tool Usage - Jira</a:t>
             </a:r>
           </a:p>
         </p:txBody>
@@ -4407,7 +4877,22 @@
           <a:bodyPr/>
           <a:lstStyle/>
           <a:p>
-            <a:endParaRPr lang="en-AU"/>
+            <a:r>
+              <a:rPr lang="en-AU" dirty="0"/>
+              <a:t>Examples of tasks</a:t>
+            </a:r>
+          </a:p>
+          <a:p>
+            <a:r>
+              <a:rPr lang="en-AU" dirty="0"/>
+              <a:t>Task completion</a:t>
+            </a:r>
+          </a:p>
+          <a:p>
+            <a:r>
+              <a:rPr lang="en-AU" dirty="0"/>
+              <a:t>Task allocation</a:t>
+            </a:r>
           </a:p>
         </p:txBody>
       </p:sp>
@@ -4415,6 +4900,175 @@
     <p:extLst>
       <p:ext uri="{BB962C8B-B14F-4D97-AF65-F5344CB8AC3E}">
         <p14:creationId xmlns:p14="http://schemas.microsoft.com/office/powerpoint/2010/main" val="4006166357"/>
+      </p:ext>
+    </p:extLst>
+  </p:cSld>
+  <p:clrMapOvr>
+    <a:masterClrMapping/>
+  </p:clrMapOvr>
+</p:sld>
+</file>
+
+<file path=ppt/slides/slide8.xml><?xml version="1.0" encoding="utf-8"?>
+<p:sld xmlns:a="http://schemas.openxmlformats.org/drawingml/2006/main" xmlns:r="http://schemas.openxmlformats.org/officeDocument/2006/relationships" xmlns:p="http://schemas.openxmlformats.org/presentationml/2006/main">
+  <p:cSld>
+    <p:spTree>
+      <p:nvGrpSpPr>
+        <p:cNvPr id="1" name=""/>
+        <p:cNvGrpSpPr/>
+        <p:nvPr/>
+      </p:nvGrpSpPr>
+      <p:grpSpPr>
+        <a:xfrm>
+          <a:off x="0" y="0"/>
+          <a:ext cx="0" cy="0"/>
+          <a:chOff x="0" y="0"/>
+          <a:chExt cx="0" cy="0"/>
+        </a:xfrm>
+      </p:grpSpPr>
+      <p:sp>
+        <p:nvSpPr>
+          <p:cNvPr id="2" name="Title 1">
+            <a:extLst>
+              <a:ext uri="{FF2B5EF4-FFF2-40B4-BE49-F238E27FC236}">
+                <a16:creationId xmlns:a16="http://schemas.microsoft.com/office/drawing/2014/main" id="{A4AE0A10-B3AE-552F-8344-5C59660A74E2}"/>
+              </a:ext>
+            </a:extLst>
+          </p:cNvPr>
+          <p:cNvSpPr>
+            <a:spLocks noGrp="1"/>
+          </p:cNvSpPr>
+          <p:nvPr>
+            <p:ph type="title"/>
+          </p:nvPr>
+        </p:nvSpPr>
+        <p:spPr/>
+        <p:txBody>
+          <a:bodyPr/>
+          <a:lstStyle/>
+          <a:p>
+            <a:r>
+              <a:rPr lang="en-AU" dirty="0"/>
+              <a:t>Version Control</a:t>
+            </a:r>
+          </a:p>
+        </p:txBody>
+      </p:sp>
+      <p:sp>
+        <p:nvSpPr>
+          <p:cNvPr id="3" name="Content Placeholder 2">
+            <a:extLst>
+              <a:ext uri="{FF2B5EF4-FFF2-40B4-BE49-F238E27FC236}">
+                <a16:creationId xmlns:a16="http://schemas.microsoft.com/office/drawing/2014/main" id="{CDD87CCE-CE9F-E7AB-74C1-FE46ACF9B231}"/>
+              </a:ext>
+            </a:extLst>
+          </p:cNvPr>
+          <p:cNvSpPr>
+            <a:spLocks noGrp="1"/>
+          </p:cNvSpPr>
+          <p:nvPr>
+            <p:ph idx="1"/>
+          </p:nvPr>
+        </p:nvSpPr>
+        <p:spPr/>
+        <p:txBody>
+          <a:bodyPr/>
+          <a:lstStyle/>
+          <a:p>
+            <a:r>
+              <a:rPr lang="en-AU" dirty="0"/>
+              <a:t>- commits, branches, authorship</a:t>
+            </a:r>
+          </a:p>
+        </p:txBody>
+      </p:sp>
+    </p:spTree>
+    <p:extLst>
+      <p:ext uri="{BB962C8B-B14F-4D97-AF65-F5344CB8AC3E}">
+        <p14:creationId xmlns:p14="http://schemas.microsoft.com/office/powerpoint/2010/main" val="3731580114"/>
+      </p:ext>
+    </p:extLst>
+  </p:cSld>
+  <p:clrMapOvr>
+    <a:masterClrMapping/>
+  </p:clrMapOvr>
+</p:sld>
+</file>
+
+<file path=ppt/slides/slide9.xml><?xml version="1.0" encoding="utf-8"?>
+<p:sld xmlns:a="http://schemas.openxmlformats.org/drawingml/2006/main" xmlns:r="http://schemas.openxmlformats.org/officeDocument/2006/relationships" xmlns:p="http://schemas.openxmlformats.org/presentationml/2006/main">
+  <p:cSld>
+    <p:spTree>
+      <p:nvGrpSpPr>
+        <p:cNvPr id="1" name=""/>
+        <p:cNvGrpSpPr/>
+        <p:nvPr/>
+      </p:nvGrpSpPr>
+      <p:grpSpPr>
+        <a:xfrm>
+          <a:off x="0" y="0"/>
+          <a:ext cx="0" cy="0"/>
+          <a:chOff x="0" y="0"/>
+          <a:chExt cx="0" cy="0"/>
+        </a:xfrm>
+      </p:grpSpPr>
+      <p:sp>
+        <p:nvSpPr>
+          <p:cNvPr id="2" name="Title 1">
+            <a:extLst>
+              <a:ext uri="{FF2B5EF4-FFF2-40B4-BE49-F238E27FC236}">
+                <a16:creationId xmlns:a16="http://schemas.microsoft.com/office/drawing/2014/main" id="{083CEA2D-89BB-E877-DD77-D6078BCCC4F4}"/>
+              </a:ext>
+            </a:extLst>
+          </p:cNvPr>
+          <p:cNvSpPr>
+            <a:spLocks noGrp="1"/>
+          </p:cNvSpPr>
+          <p:nvPr>
+            <p:ph type="title"/>
+          </p:nvPr>
+        </p:nvSpPr>
+        <p:spPr/>
+        <p:txBody>
+          <a:bodyPr/>
+          <a:lstStyle/>
+          <a:p>
+            <a:r>
+              <a:rPr lang="en-AU" dirty="0"/>
+              <a:t>Java Walkthrough – Pt 1</a:t>
+            </a:r>
+          </a:p>
+        </p:txBody>
+      </p:sp>
+      <p:sp>
+        <p:nvSpPr>
+          <p:cNvPr id="3" name="Content Placeholder 2">
+            <a:extLst>
+              <a:ext uri="{FF2B5EF4-FFF2-40B4-BE49-F238E27FC236}">
+                <a16:creationId xmlns:a16="http://schemas.microsoft.com/office/drawing/2014/main" id="{57DBC791-C4BA-1AC4-0103-268CD36B08CF}"/>
+              </a:ext>
+            </a:extLst>
+          </p:cNvPr>
+          <p:cNvSpPr>
+            <a:spLocks noGrp="1"/>
+          </p:cNvSpPr>
+          <p:nvPr>
+            <p:ph idx="1"/>
+          </p:nvPr>
+        </p:nvSpPr>
+        <p:spPr/>
+        <p:txBody>
+          <a:bodyPr/>
+          <a:lstStyle/>
+          <a:p>
+            <a:endParaRPr lang="en-AU"/>
+          </a:p>
+        </p:txBody>
+      </p:sp>
+    </p:spTree>
+    <p:extLst>
+      <p:ext uri="{BB962C8B-B14F-4D97-AF65-F5344CB8AC3E}">
+        <p14:creationId xmlns:p14="http://schemas.microsoft.com/office/powerpoint/2010/main" val="1441937421"/>
       </p:ext>
     </p:extLst>
   </p:cSld>
